--- a/decks/hist-dictatorship/hist-dictatorship_ch4_nazi-control.pptx
+++ b/decks/hist-dictatorship/hist-dictatorship_ch4_nazi-control.pptx
@@ -130,31 +130,31 @@
   <p:extLst>
     <p:ext uri="{521415D9-36F7-43E2-AB2F-B90AF26B5E84}">
       <p14:sectionLst xmlns:p14="http://schemas.microsoft.com/office/powerpoint/2010/main">
-        <p14:section name="Opening" id="{4abc99b5-a5eb-135d-0746-95022872c496}">
+        <p14:section name="Opening" id="{0c81d005-31bb-f51a-d40e-69e0dc534341}">
           <p14:sldIdLst>
             <p14:sldId id="256"/>
           </p14:sldIdLst>
         </p14:section>
-        <p14:section name="Gate" id="{08504b0c-4d23-892a-3bff-9e6af833ee2d}">
+        <p14:section name="Gate" id="{7e26f3bd-48d7-b648-0261-33362a65138b}">
           <p14:sldIdLst>
             <p14:sldId id="257"/>
             <p14:sldId id="258"/>
             <p14:sldId id="259"/>
           </p14:sldIdLst>
         </p14:section>
-        <p14:section name="Pre-teach" id="{689f7ab1-69d4-9c1f-c0d5-1d1ed3c7d099}">
+        <p14:section name="Pre-teach" id="{028d127e-1174-304c-f685-7b0600b0377d}">
           <p14:sldIdLst>
             <p14:sldId id="260"/>
             <p14:sldId id="261"/>
           </p14:sldIdLst>
         </p14:section>
-        <p14:section name="Read-along" id="{f9f7a6cb-dfde-494c-1c55-51be1571dcdb}">
+        <p14:section name="Read-along" id="{0f3f593a-a42d-6cc4-1611-4ea47145f576}">
           <p14:sldIdLst>
             <p14:sldId id="262"/>
             <p14:sldId id="263"/>
           </p14:sldIdLst>
         </p14:section>
-        <p14:section name="Teach" id="{8549ff1a-3c39-76b0-9af8-953f3ca08f7d}">
+        <p14:section name="Teach" id="{6d7e41ed-4d19-80d9-44a9-6c4b91424bd5}">
           <p14:sldIdLst>
             <p14:sldId id="264"/>
             <p14:sldId id="265"/>
@@ -164,7 +164,7 @@
             <p14:sldId id="269"/>
           </p14:sldIdLst>
         </p14:section>
-        <p14:section name="Routes" id="{f7e02d13-474e-6ea5-d1da-1c5e36a26f45}">
+        <p14:section name="Routes" id="{3b4e59e6-c7e9-4792-1061-bea57cbd2430}">
           <p14:sldIdLst>
             <p14:sldId id="270"/>
             <p14:sldId id="271"/>
@@ -174,12 +174,12 @@
             <p14:sldId id="275"/>
           </p14:sldIdLst>
         </p14:section>
-        <p14:section name="Close" id="{f428d6cc-3a00-b37e-11b9-299b534076fa}">
+        <p14:section name="Close" id="{06897cb5-ca6d-a708-d4c1-a194f522bf22}">
           <p14:sldIdLst>
             <p14:sldId id="276"/>
           </p14:sldIdLst>
         </p14:section>
-        <p14:section name="Answers" id="{9660a177-d989-494e-952f-a3334a5ab3dd}">
+        <p14:section name="Answers" id="{31134145-98f1-ea13-58d0-03011aa0dec5}">
           <p14:sldIdLst>
             <p14:sldId id="277"/>
             <p14:sldId id="278"/>
